--- a/01/ppt/01-2_수업_열기_v2.pptx
+++ b/01/ppt/01-2_수업_열기_v2.pptx
@@ -2746,6 +2746,10 @@
             <a:prstDash val="solid"/>
           </a:ln>
         </p:spPr>
+        <p:txBody xmlns:a="http://schemas.openxmlformats.org/drawingml/2006/main">
+          <a:bodyPr/>
+          <a:p/>
+        </p:txBody>
       </p:sp>
       <p:sp>
         <p:nvSpPr>
@@ -2963,6 +2967,10 @@
             <a:prstDash val="solid"/>
           </a:ln>
         </p:spPr>
+        <p:txBody xmlns:a="http://schemas.openxmlformats.org/drawingml/2006/main">
+          <a:bodyPr/>
+          <a:p/>
+        </p:txBody>
       </p:sp>
       <p:sp>
         <p:nvSpPr>
@@ -3083,7 +3091,7 @@
                 <a:ea typeface="IBM Plex Sans KR"/>
                 <a:cs typeface="IBM Plex Sans KR"/>
               </a:rPr>
-              <a:t>수업자료 1-2 p.1</a:t>
+              <a:t>교과서 01-2 · 1쪽</a:t>
             </a:r>
           </a:p>
         </p:txBody>
@@ -3213,6 +3221,10 @@
             <a:prstDash val="solid"/>
           </a:ln>
         </p:spPr>
+        <p:txBody xmlns:a="http://schemas.openxmlformats.org/drawingml/2006/main">
+          <a:bodyPr/>
+          <a:p/>
+        </p:txBody>
       </p:sp>
       <p:sp>
         <p:nvSpPr>
@@ -3368,6 +3380,10 @@
             <a:prstDash val="solid"/>
           </a:ln>
         </p:spPr>
+        <p:txBody xmlns:a="http://schemas.openxmlformats.org/drawingml/2006/main">
+          <a:bodyPr/>
+          <a:p/>
+        </p:txBody>
       </p:sp>
       <p:sp>
         <p:nvSpPr>
@@ -3465,6 +3481,10 @@
             <a:prstDash val="solid"/>
           </a:ln>
         </p:spPr>
+        <p:txBody xmlns:a="http://schemas.openxmlformats.org/drawingml/2006/main">
+          <a:bodyPr/>
+          <a:p/>
+        </p:txBody>
       </p:sp>
       <p:sp>
         <p:nvSpPr>
@@ -3748,6 +3768,10 @@
             <a:prstDash val="solid"/>
           </a:ln>
         </p:spPr>
+        <p:txBody xmlns:a="http://schemas.openxmlformats.org/drawingml/2006/main">
+          <a:bodyPr/>
+          <a:p/>
+        </p:txBody>
       </p:sp>
       <p:sp>
         <p:nvSpPr>
@@ -4031,6 +4055,10 @@
             <a:prstDash val="solid"/>
           </a:ln>
         </p:spPr>
+        <p:txBody xmlns:a="http://schemas.openxmlformats.org/drawingml/2006/main">
+          <a:bodyPr/>
+          <a:p/>
+        </p:txBody>
       </p:sp>
       <p:sp>
         <p:nvSpPr>
@@ -4314,6 +4342,10 @@
             <a:prstDash val="solid"/>
           </a:ln>
         </p:spPr>
+        <p:txBody xmlns:a="http://schemas.openxmlformats.org/drawingml/2006/main">
+          <a:bodyPr/>
+          <a:p/>
+        </p:txBody>
       </p:sp>
       <p:sp>
         <p:nvSpPr>
@@ -4434,7 +4466,7 @@
                 <a:ea typeface="IBM Plex Sans KR"/>
                 <a:cs typeface="IBM Plex Sans KR"/>
               </a:rPr>
-              <a:t>수업자료 1-2 pp.13–16</a:t>
+              <a:t>교과서 01-2 · 13–16쪽</a:t>
             </a:r>
           </a:p>
         </p:txBody>
@@ -4564,6 +4596,10 @@
             <a:prstDash val="solid"/>
           </a:ln>
         </p:spPr>
+        <p:txBody xmlns:a="http://schemas.openxmlformats.org/drawingml/2006/main">
+          <a:bodyPr/>
+          <a:p/>
+        </p:txBody>
       </p:sp>
       <p:sp>
         <p:nvSpPr>
@@ -4719,6 +4755,10 @@
             <a:prstDash val="solid"/>
           </a:ln>
         </p:spPr>
+        <p:txBody xmlns:a="http://schemas.openxmlformats.org/drawingml/2006/main">
+          <a:bodyPr/>
+          <a:p/>
+        </p:txBody>
       </p:sp>
       <p:sp>
         <p:nvSpPr>
@@ -4816,6 +4856,10 @@
             <a:prstDash val="solid"/>
           </a:ln>
         </p:spPr>
+        <p:txBody xmlns:a="http://schemas.openxmlformats.org/drawingml/2006/main">
+          <a:bodyPr/>
+          <a:p/>
+        </p:txBody>
       </p:sp>
       <p:sp>
         <p:nvSpPr>
@@ -5099,6 +5143,10 @@
             <a:prstDash val="solid"/>
           </a:ln>
         </p:spPr>
+        <p:txBody xmlns:a="http://schemas.openxmlformats.org/drawingml/2006/main">
+          <a:bodyPr/>
+          <a:p/>
+        </p:txBody>
       </p:sp>
       <p:sp>
         <p:nvSpPr>
@@ -5382,6 +5430,10 @@
             <a:prstDash val="solid"/>
           </a:ln>
         </p:spPr>
+        <p:txBody xmlns:a="http://schemas.openxmlformats.org/drawingml/2006/main">
+          <a:bodyPr/>
+          <a:p/>
+        </p:txBody>
       </p:sp>
       <p:sp>
         <p:nvSpPr>
@@ -5665,6 +5717,10 @@
             <a:prstDash val="solid"/>
           </a:ln>
         </p:spPr>
+        <p:txBody xmlns:a="http://schemas.openxmlformats.org/drawingml/2006/main">
+          <a:bodyPr/>
+          <a:p/>
+        </p:txBody>
       </p:sp>
       <p:sp>
         <p:nvSpPr>
@@ -5971,7 +6027,7 @@
                 <a:ea typeface="IBM Plex Sans KR"/>
                 <a:cs typeface="IBM Plex Sans KR"/>
               </a:rPr>
-              <a:t>수업자료 1-2 pp.14–16</a:t>
+              <a:t>교과서 01-2 · 14–16쪽</a:t>
             </a:r>
           </a:p>
         </p:txBody>
@@ -6101,6 +6157,10 @@
             <a:prstDash val="solid"/>
           </a:ln>
         </p:spPr>
+        <p:txBody xmlns:a="http://schemas.openxmlformats.org/drawingml/2006/main">
+          <a:bodyPr/>
+          <a:p/>
+        </p:txBody>
       </p:sp>
       <p:sp>
         <p:nvSpPr>
@@ -6256,6 +6316,10 @@
             <a:prstDash val="solid"/>
           </a:ln>
         </p:spPr>
+        <p:txBody xmlns:a="http://schemas.openxmlformats.org/drawingml/2006/main">
+          <a:bodyPr/>
+          <a:p/>
+        </p:txBody>
       </p:sp>
       <p:sp>
         <p:nvSpPr>
@@ -6353,6 +6417,10 @@
             <a:prstDash val="solid"/>
           </a:ln>
         </p:spPr>
+        <p:txBody xmlns:a="http://schemas.openxmlformats.org/drawingml/2006/main">
+          <a:bodyPr/>
+          <a:p/>
+        </p:txBody>
       </p:sp>
       <p:sp>
         <p:nvSpPr>
@@ -7031,7 +7099,7 @@
                 <a:ea typeface="IBM Plex Sans KR"/>
                 <a:cs typeface="IBM Plex Sans KR"/>
               </a:rPr>
-              <a:t>수업자료 1-2 p.19</a:t>
+              <a:t>교과서 01-2 · 19쪽</a:t>
             </a:r>
           </a:p>
         </p:txBody>
@@ -7161,6 +7229,10 @@
             <a:prstDash val="solid"/>
           </a:ln>
         </p:spPr>
+        <p:txBody xmlns:a="http://schemas.openxmlformats.org/drawingml/2006/main">
+          <a:bodyPr/>
+          <a:p/>
+        </p:txBody>
       </p:sp>
       <p:sp>
         <p:nvSpPr>
@@ -7316,6 +7388,10 @@
             <a:prstDash val="solid"/>
           </a:ln>
         </p:spPr>
+        <p:txBody xmlns:a="http://schemas.openxmlformats.org/drawingml/2006/main">
+          <a:bodyPr/>
+          <a:p/>
+        </p:txBody>
       </p:sp>
       <p:sp>
         <p:nvSpPr>
@@ -7440,6 +7516,10 @@
             <a:prstDash val="solid"/>
           </a:ln>
         </p:spPr>
+        <p:txBody xmlns:a="http://schemas.openxmlformats.org/drawingml/2006/main">
+          <a:bodyPr/>
+          <a:p/>
+        </p:txBody>
       </p:sp>
       <p:sp>
         <p:nvSpPr>
@@ -7595,6 +7675,10 @@
             <a:prstDash val="solid"/>
           </a:ln>
         </p:spPr>
+        <p:txBody xmlns:a="http://schemas.openxmlformats.org/drawingml/2006/main">
+          <a:bodyPr/>
+          <a:p/>
+        </p:txBody>
       </p:sp>
       <p:sp>
         <p:nvSpPr>
@@ -7839,7 +7923,7 @@
                 <a:ea typeface="IBM Plex Sans KR"/>
                 <a:cs typeface="IBM Plex Sans KR"/>
               </a:rPr>
-              <a:t>수업자료 1-2 pp.3–4</a:t>
+              <a:t>교과서 01-2 · 3–4쪽</a:t>
             </a:r>
           </a:p>
         </p:txBody>
@@ -7969,6 +8053,10 @@
             <a:prstDash val="solid"/>
           </a:ln>
         </p:spPr>
+        <p:txBody xmlns:a="http://schemas.openxmlformats.org/drawingml/2006/main">
+          <a:bodyPr/>
+          <a:p/>
+        </p:txBody>
       </p:sp>
       <p:sp>
         <p:nvSpPr>
@@ -8124,6 +8212,10 @@
             <a:prstDash val="solid"/>
           </a:ln>
         </p:spPr>
+        <p:txBody xmlns:a="http://schemas.openxmlformats.org/drawingml/2006/main">
+          <a:bodyPr/>
+          <a:p/>
+        </p:txBody>
       </p:sp>
       <p:sp>
         <p:nvSpPr>
@@ -8283,6 +8375,10 @@
             <a:prstDash val="solid"/>
           </a:ln>
         </p:spPr>
+        <p:txBody xmlns:a="http://schemas.openxmlformats.org/drawingml/2006/main">
+          <a:bodyPr/>
+          <a:p/>
+        </p:txBody>
       </p:sp>
       <p:sp>
         <p:nvSpPr>
@@ -8713,7 +8809,7 @@
                 <a:ea typeface="IBM Plex Sans KR"/>
                 <a:cs typeface="IBM Plex Sans KR"/>
               </a:rPr>
-              <a:t>수업자료 1-2 p.2</a:t>
+              <a:t>교과서 01-2 · 2쪽</a:t>
             </a:r>
           </a:p>
         </p:txBody>
@@ -8843,6 +8939,10 @@
             <a:prstDash val="solid"/>
           </a:ln>
         </p:spPr>
+        <p:txBody xmlns:a="http://schemas.openxmlformats.org/drawingml/2006/main">
+          <a:bodyPr/>
+          <a:p/>
+        </p:txBody>
       </p:sp>
       <p:sp>
         <p:nvSpPr>
@@ -8998,6 +9098,10 @@
             <a:prstDash val="solid"/>
           </a:ln>
         </p:spPr>
+        <p:txBody xmlns:a="http://schemas.openxmlformats.org/drawingml/2006/main">
+          <a:bodyPr/>
+          <a:p/>
+        </p:txBody>
       </p:sp>
       <p:sp>
         <p:nvSpPr>
@@ -9095,6 +9199,10 @@
             <a:prstDash val="solid"/>
           </a:ln>
         </p:spPr>
+        <p:txBody xmlns:a="http://schemas.openxmlformats.org/drawingml/2006/main">
+          <a:bodyPr/>
+          <a:p/>
+        </p:txBody>
       </p:sp>
       <p:sp>
         <p:nvSpPr>
@@ -9130,6 +9238,10 @@
             <a:prstDash val="solid"/>
           </a:ln>
         </p:spPr>
+        <p:txBody xmlns:a="http://schemas.openxmlformats.org/drawingml/2006/main">
+          <a:bodyPr/>
+          <a:p/>
+        </p:txBody>
       </p:sp>
       <p:sp>
         <p:nvSpPr>
@@ -9544,7 +9656,7 @@
                 <a:ea typeface="IBM Plex Sans KR"/>
                 <a:cs typeface="IBM Plex Sans KR"/>
               </a:rPr>
-              <a:t>수업자료 1-2 p.5</a:t>
+              <a:t>교과서 01-2 · 5쪽</a:t>
             </a:r>
           </a:p>
         </p:txBody>
@@ -9674,6 +9786,10 @@
             <a:prstDash val="solid"/>
           </a:ln>
         </p:spPr>
+        <p:txBody xmlns:a="http://schemas.openxmlformats.org/drawingml/2006/main">
+          <a:bodyPr/>
+          <a:p/>
+        </p:txBody>
       </p:sp>
       <p:sp>
         <p:nvSpPr>
@@ -9829,6 +9945,10 @@
             <a:prstDash val="solid"/>
           </a:ln>
         </p:spPr>
+        <p:txBody xmlns:a="http://schemas.openxmlformats.org/drawingml/2006/main">
+          <a:bodyPr/>
+          <a:p/>
+        </p:txBody>
       </p:sp>
       <p:sp>
         <p:nvSpPr>
@@ -9951,6 +10071,10 @@
             <a:prstDash val="solid"/>
           </a:ln>
         </p:spPr>
+        <p:txBody xmlns:a="http://schemas.openxmlformats.org/drawingml/2006/main">
+          <a:bodyPr/>
+          <a:p/>
+        </p:txBody>
       </p:sp>
       <p:sp>
         <p:nvSpPr>
@@ -10224,6 +10348,10 @@
             <a:prstDash val="solid"/>
           </a:ln>
         </p:spPr>
+        <p:txBody xmlns:a="http://schemas.openxmlformats.org/drawingml/2006/main">
+          <a:bodyPr/>
+          <a:p/>
+        </p:txBody>
       </p:sp>
       <p:sp>
         <p:nvSpPr>
@@ -10488,7 +10616,7 @@
                 <a:ea typeface="IBM Plex Sans KR"/>
                 <a:cs typeface="IBM Plex Sans KR"/>
               </a:rPr>
-              <a:t>수업자료 1-2 pp.6–7</a:t>
+              <a:t>교과서 01-2 · 6–7쪽</a:t>
             </a:r>
           </a:p>
         </p:txBody>
@@ -10618,6 +10746,10 @@
             <a:prstDash val="solid"/>
           </a:ln>
         </p:spPr>
+        <p:txBody xmlns:a="http://schemas.openxmlformats.org/drawingml/2006/main">
+          <a:bodyPr/>
+          <a:p/>
+        </p:txBody>
       </p:sp>
       <p:sp>
         <p:nvSpPr>
@@ -10773,6 +10905,10 @@
             <a:prstDash val="solid"/>
           </a:ln>
         </p:spPr>
+        <p:txBody xmlns:a="http://schemas.openxmlformats.org/drawingml/2006/main">
+          <a:bodyPr/>
+          <a:p/>
+        </p:txBody>
       </p:sp>
       <p:sp>
         <p:nvSpPr>
@@ -10870,6 +11006,10 @@
             <a:prstDash val="solid"/>
           </a:ln>
         </p:spPr>
+        <p:txBody xmlns:a="http://schemas.openxmlformats.org/drawingml/2006/main">
+          <a:bodyPr/>
+          <a:p/>
+        </p:txBody>
       </p:sp>
       <p:sp>
         <p:nvSpPr>
@@ -11029,6 +11169,10 @@
             <a:prstDash val="solid"/>
           </a:ln>
         </p:spPr>
+        <p:txBody xmlns:a="http://schemas.openxmlformats.org/drawingml/2006/main">
+          <a:bodyPr/>
+          <a:p/>
+        </p:txBody>
       </p:sp>
       <p:sp>
         <p:nvSpPr>
@@ -11188,6 +11332,10 @@
             <a:prstDash val="solid"/>
           </a:ln>
         </p:spPr>
+        <p:txBody xmlns:a="http://schemas.openxmlformats.org/drawingml/2006/main">
+          <a:bodyPr/>
+          <a:p/>
+        </p:txBody>
       </p:sp>
       <p:sp>
         <p:nvSpPr>
@@ -11308,7 +11456,7 @@
                 <a:ea typeface="IBM Plex Sans KR"/>
                 <a:cs typeface="IBM Plex Sans KR"/>
               </a:rPr>
-              <a:t>수업자료 1-2 pp.8–9</a:t>
+              <a:t>교과서 01-2 · 8–9쪽</a:t>
             </a:r>
           </a:p>
         </p:txBody>
@@ -11438,6 +11586,10 @@
             <a:prstDash val="solid"/>
           </a:ln>
         </p:spPr>
+        <p:txBody xmlns:a="http://schemas.openxmlformats.org/drawingml/2006/main">
+          <a:bodyPr/>
+          <a:p/>
+        </p:txBody>
       </p:sp>
       <p:sp>
         <p:nvSpPr>
@@ -11593,6 +11745,10 @@
             <a:prstDash val="solid"/>
           </a:ln>
         </p:spPr>
+        <p:txBody xmlns:a="http://schemas.openxmlformats.org/drawingml/2006/main">
+          <a:bodyPr/>
+          <a:p/>
+        </p:txBody>
       </p:sp>
       <p:sp>
         <p:nvSpPr>
@@ -11690,6 +11846,10 @@
             <a:prstDash val="solid"/>
           </a:ln>
         </p:spPr>
+        <p:txBody xmlns:a="http://schemas.openxmlformats.org/drawingml/2006/main">
+          <a:bodyPr/>
+          <a:p/>
+        </p:txBody>
       </p:sp>
       <p:sp>
         <p:nvSpPr>
@@ -11725,6 +11885,10 @@
             <a:prstDash val="solid"/>
           </a:ln>
         </p:spPr>
+        <p:txBody xmlns:a="http://schemas.openxmlformats.org/drawingml/2006/main">
+          <a:bodyPr/>
+          <a:p/>
+        </p:txBody>
       </p:sp>
       <p:sp>
         <p:nvSpPr>
@@ -11946,6 +12110,10 @@
             <a:prstDash val="solid"/>
           </a:ln>
         </p:spPr>
+        <p:txBody xmlns:a="http://schemas.openxmlformats.org/drawingml/2006/main">
+          <a:bodyPr/>
+          <a:p/>
+        </p:txBody>
       </p:sp>
       <p:sp>
         <p:nvSpPr>
@@ -11981,6 +12149,10 @@
             <a:prstDash val="solid"/>
           </a:ln>
         </p:spPr>
+        <p:txBody xmlns:a="http://schemas.openxmlformats.org/drawingml/2006/main">
+          <a:bodyPr/>
+          <a:p/>
+        </p:txBody>
       </p:sp>
       <p:sp>
         <p:nvSpPr>
@@ -12202,6 +12374,10 @@
             <a:prstDash val="solid"/>
           </a:ln>
         </p:spPr>
+        <p:txBody xmlns:a="http://schemas.openxmlformats.org/drawingml/2006/main">
+          <a:bodyPr/>
+          <a:p/>
+        </p:txBody>
       </p:sp>
       <p:sp>
         <p:nvSpPr>
@@ -12237,6 +12413,10 @@
             <a:prstDash val="solid"/>
           </a:ln>
         </p:spPr>
+        <p:txBody xmlns:a="http://schemas.openxmlformats.org/drawingml/2006/main">
+          <a:bodyPr/>
+          <a:p/>
+        </p:txBody>
       </p:sp>
       <p:sp>
         <p:nvSpPr>
@@ -12543,7 +12723,7 @@
                 <a:ea typeface="IBM Plex Sans KR"/>
                 <a:cs typeface="IBM Plex Sans KR"/>
               </a:rPr>
-              <a:t>수업자료 1-2 pp.8–9</a:t>
+              <a:t>교과서 01-2 · 8–9쪽</a:t>
             </a:r>
           </a:p>
         </p:txBody>
@@ -12673,6 +12853,10 @@
             <a:prstDash val="solid"/>
           </a:ln>
         </p:spPr>
+        <p:txBody xmlns:a="http://schemas.openxmlformats.org/drawingml/2006/main">
+          <a:bodyPr/>
+          <a:p/>
+        </p:txBody>
       </p:sp>
       <p:sp>
         <p:nvSpPr>
@@ -12828,6 +13012,10 @@
             <a:prstDash val="solid"/>
           </a:ln>
         </p:spPr>
+        <p:txBody xmlns:a="http://schemas.openxmlformats.org/drawingml/2006/main">
+          <a:bodyPr/>
+          <a:p/>
+        </p:txBody>
       </p:sp>
       <p:sp>
         <p:nvSpPr>
@@ -12925,6 +13113,10 @@
             <a:prstDash val="solid"/>
           </a:ln>
         </p:spPr>
+        <p:txBody xmlns:a="http://schemas.openxmlformats.org/drawingml/2006/main">
+          <a:bodyPr/>
+          <a:p/>
+        </p:txBody>
       </p:sp>
       <p:sp>
         <p:nvSpPr>
@@ -13022,6 +13214,10 @@
             <a:prstDash val="solid"/>
           </a:ln>
         </p:spPr>
+        <p:txBody xmlns:a="http://schemas.openxmlformats.org/drawingml/2006/main">
+          <a:bodyPr/>
+          <a:p/>
+        </p:txBody>
       </p:sp>
       <p:sp>
         <p:nvSpPr>
@@ -13305,6 +13501,10 @@
             <a:prstDash val="solid"/>
           </a:ln>
         </p:spPr>
+        <p:txBody xmlns:a="http://schemas.openxmlformats.org/drawingml/2006/main">
+          <a:bodyPr/>
+          <a:p/>
+        </p:txBody>
       </p:sp>
       <p:sp>
         <p:nvSpPr>
@@ -13588,6 +13788,10 @@
             <a:prstDash val="solid"/>
           </a:ln>
         </p:spPr>
+        <p:txBody xmlns:a="http://schemas.openxmlformats.org/drawingml/2006/main">
+          <a:bodyPr/>
+          <a:p/>
+        </p:txBody>
       </p:sp>
       <p:sp>
         <p:nvSpPr>
@@ -13871,6 +14075,10 @@
             <a:prstDash val="solid"/>
           </a:ln>
         </p:spPr>
+        <p:txBody xmlns:a="http://schemas.openxmlformats.org/drawingml/2006/main">
+          <a:bodyPr/>
+          <a:p/>
+        </p:txBody>
       </p:sp>
       <p:sp>
         <p:nvSpPr>
@@ -14154,6 +14362,10 @@
             <a:prstDash val="solid"/>
           </a:ln>
         </p:spPr>
+        <p:txBody xmlns:a="http://schemas.openxmlformats.org/drawingml/2006/main">
+          <a:bodyPr/>
+          <a:p/>
+        </p:txBody>
       </p:sp>
       <p:sp>
         <p:nvSpPr>
@@ -14460,7 +14672,7 @@
                 <a:ea typeface="IBM Plex Sans KR"/>
                 <a:cs typeface="IBM Plex Sans KR"/>
               </a:rPr>
-              <a:t>수업자료 1-2 pp.11–12</a:t>
+              <a:t>교과서 01-2 · 11–12쪽</a:t>
             </a:r>
           </a:p>
         </p:txBody>
@@ -14590,6 +14802,10 @@
             <a:prstDash val="solid"/>
           </a:ln>
         </p:spPr>
+        <p:txBody xmlns:a="http://schemas.openxmlformats.org/drawingml/2006/main">
+          <a:bodyPr/>
+          <a:p/>
+        </p:txBody>
       </p:sp>
       <p:sp>
         <p:nvSpPr>
@@ -14745,6 +14961,10 @@
             <a:prstDash val="solid"/>
           </a:ln>
         </p:spPr>
+        <p:txBody xmlns:a="http://schemas.openxmlformats.org/drawingml/2006/main">
+          <a:bodyPr/>
+          <a:p/>
+        </p:txBody>
       </p:sp>
       <p:sp>
         <p:nvSpPr>
@@ -14842,6 +15062,10 @@
             <a:prstDash val="solid"/>
           </a:ln>
         </p:spPr>
+        <p:txBody xmlns:a="http://schemas.openxmlformats.org/drawingml/2006/main">
+          <a:bodyPr/>
+          <a:p/>
+        </p:txBody>
       </p:sp>
       <p:sp>
         <p:nvSpPr>
@@ -15001,6 +15225,10 @@
             <a:prstDash val="solid"/>
           </a:ln>
         </p:spPr>
+        <p:txBody xmlns:a="http://schemas.openxmlformats.org/drawingml/2006/main">
+          <a:bodyPr/>
+          <a:p/>
+        </p:txBody>
       </p:sp>
       <p:sp>
         <p:nvSpPr>
@@ -15160,6 +15388,10 @@
             <a:prstDash val="solid"/>
           </a:ln>
         </p:spPr>
+        <p:txBody xmlns:a="http://schemas.openxmlformats.org/drawingml/2006/main">
+          <a:bodyPr/>
+          <a:p/>
+        </p:txBody>
       </p:sp>
       <p:sp>
         <p:nvSpPr>
@@ -15439,6 +15671,10 @@
             <a:prstDash val="solid"/>
           </a:ln>
         </p:spPr>
+        <p:txBody xmlns:a="http://schemas.openxmlformats.org/drawingml/2006/main">
+          <a:bodyPr/>
+          <a:p/>
+        </p:txBody>
       </p:sp>
       <p:sp>
         <p:nvSpPr>
@@ -15470,6 +15706,10 @@
             <a:prstDash val="solid"/>
           </a:ln>
         </p:spPr>
+        <p:txBody xmlns:a="http://schemas.openxmlformats.org/drawingml/2006/main">
+          <a:bodyPr/>
+          <a:p/>
+        </p:txBody>
       </p:sp>
       <p:sp>
         <p:nvSpPr>
@@ -15501,6 +15741,10 @@
             <a:prstDash val="solid"/>
           </a:ln>
         </p:spPr>
+        <p:txBody xmlns:a="http://schemas.openxmlformats.org/drawingml/2006/main">
+          <a:bodyPr/>
+          <a:p/>
+        </p:txBody>
       </p:sp>
       <p:sp>
         <p:nvSpPr>
@@ -15532,6 +15776,10 @@
             <a:prstDash val="solid"/>
           </a:ln>
         </p:spPr>
+        <p:txBody xmlns:a="http://schemas.openxmlformats.org/drawingml/2006/main">
+          <a:bodyPr/>
+          <a:p/>
+        </p:txBody>
       </p:sp>
       <p:sp>
         <p:nvSpPr>
@@ -15563,6 +15811,10 @@
             <a:prstDash val="solid"/>
           </a:ln>
         </p:spPr>
+        <p:txBody xmlns:a="http://schemas.openxmlformats.org/drawingml/2006/main">
+          <a:bodyPr/>
+          <a:p/>
+        </p:txBody>
       </p:sp>
       <p:sp>
         <p:nvSpPr>
@@ -15594,6 +15846,10 @@
             <a:prstDash val="solid"/>
           </a:ln>
         </p:spPr>
+        <p:txBody xmlns:a="http://schemas.openxmlformats.org/drawingml/2006/main">
+          <a:bodyPr/>
+          <a:p/>
+        </p:txBody>
       </p:sp>
       <p:sp>
         <p:nvSpPr>
@@ -15625,6 +15881,10 @@
             <a:prstDash val="solid"/>
           </a:ln>
         </p:spPr>
+        <p:txBody xmlns:a="http://schemas.openxmlformats.org/drawingml/2006/main">
+          <a:bodyPr/>
+          <a:p/>
+        </p:txBody>
       </p:sp>
       <p:sp>
         <p:nvSpPr>
@@ -15656,6 +15916,10 @@
             <a:prstDash val="solid"/>
           </a:ln>
         </p:spPr>
+        <p:txBody xmlns:a="http://schemas.openxmlformats.org/drawingml/2006/main">
+          <a:bodyPr/>
+          <a:p/>
+        </p:txBody>
       </p:sp>
       <p:sp>
         <p:nvSpPr>
@@ -15687,6 +15951,10 @@
             <a:prstDash val="solid"/>
           </a:ln>
         </p:spPr>
+        <p:txBody xmlns:a="http://schemas.openxmlformats.org/drawingml/2006/main">
+          <a:bodyPr/>
+          <a:p/>
+        </p:txBody>
       </p:sp>
       <p:sp>
         <p:nvSpPr>
@@ -15718,6 +15986,10 @@
             <a:prstDash val="solid"/>
           </a:ln>
         </p:spPr>
+        <p:txBody xmlns:a="http://schemas.openxmlformats.org/drawingml/2006/main">
+          <a:bodyPr/>
+          <a:p/>
+        </p:txBody>
       </p:sp>
       <p:sp>
         <p:nvSpPr>
@@ -16024,7 +16296,7 @@
                 <a:ea typeface="IBM Plex Sans KR"/>
                 <a:cs typeface="IBM Plex Sans KR"/>
               </a:rPr>
-              <a:t>수업자료 1-2 p.10</a:t>
+              <a:t>교과서 01-2 · 10쪽</a:t>
             </a:r>
           </a:p>
         </p:txBody>

--- a/01/ppt/01-2_수업_열기_v2.pptx
+++ b/01/ppt/01-2_수업_열기_v2.pptx
@@ -4466,7 +4466,7 @@
                 <a:ea typeface="IBM Plex Sans KR"/>
                 <a:cs typeface="IBM Plex Sans KR"/>
               </a:rPr>
-              <a:t>교과서 01-2 · 13–16쪽</a:t>
+              <a:t>교과서 01-2 · 14–17쪽</a:t>
             </a:r>
           </a:p>
         </p:txBody>
@@ -6027,7 +6027,7 @@
                 <a:ea typeface="IBM Plex Sans KR"/>
                 <a:cs typeface="IBM Plex Sans KR"/>
               </a:rPr>
-              <a:t>교과서 01-2 · 14–16쪽</a:t>
+              <a:t>교과서 01-2 · 15–17쪽</a:t>
             </a:r>
           </a:p>
         </p:txBody>
@@ -7099,7 +7099,7 @@
                 <a:ea typeface="IBM Plex Sans KR"/>
                 <a:cs typeface="IBM Plex Sans KR"/>
               </a:rPr>
-              <a:t>교과서 01-2 · 19쪽</a:t>
+              <a:t>교과서 01-2 · 20쪽</a:t>
             </a:r>
           </a:p>
         </p:txBody>
@@ -9656,7 +9656,7 @@
                 <a:ea typeface="IBM Plex Sans KR"/>
                 <a:cs typeface="IBM Plex Sans KR"/>
               </a:rPr>
-              <a:t>교과서 01-2 · 5쪽</a:t>
+              <a:t>교과서 01-2 · 5–6쪽</a:t>
             </a:r>
           </a:p>
         </p:txBody>
@@ -10616,7 +10616,7 @@
                 <a:ea typeface="IBM Plex Sans KR"/>
                 <a:cs typeface="IBM Plex Sans KR"/>
               </a:rPr>
-              <a:t>교과서 01-2 · 6–7쪽</a:t>
+              <a:t>교과서 01-2 · 7–8쪽</a:t>
             </a:r>
           </a:p>
         </p:txBody>
@@ -11456,7 +11456,7 @@
                 <a:ea typeface="IBM Plex Sans KR"/>
                 <a:cs typeface="IBM Plex Sans KR"/>
               </a:rPr>
-              <a:t>교과서 01-2 · 8–9쪽</a:t>
+              <a:t>교과서 01-2 · 9–10쪽</a:t>
             </a:r>
           </a:p>
         </p:txBody>
@@ -12723,7 +12723,7 @@
                 <a:ea typeface="IBM Plex Sans KR"/>
                 <a:cs typeface="IBM Plex Sans KR"/>
               </a:rPr>
-              <a:t>교과서 01-2 · 8–9쪽</a:t>
+              <a:t>교과서 01-2 · 9–10쪽</a:t>
             </a:r>
           </a:p>
         </p:txBody>
@@ -14672,7 +14672,7 @@
                 <a:ea typeface="IBM Plex Sans KR"/>
                 <a:cs typeface="IBM Plex Sans KR"/>
               </a:rPr>
-              <a:t>교과서 01-2 · 11–12쪽</a:t>
+              <a:t>교과서 01-2 · 12–13쪽</a:t>
             </a:r>
           </a:p>
         </p:txBody>
@@ -16296,7 +16296,7 @@
                 <a:ea typeface="IBM Plex Sans KR"/>
                 <a:cs typeface="IBM Plex Sans KR"/>
               </a:rPr>
-              <a:t>교과서 01-2 · 10쪽</a:t>
+              <a:t>교과서 01-2 · 11쪽</a:t>
             </a:r>
           </a:p>
         </p:txBody>
